--- a/ppts/CHAPTER 5 Cognitive Architectures with LangGraph.pptx
+++ b/ppts/CHAPTER 5 Cognitive Architectures with LangGraph.pptx
@@ -5,10 +5,10 @@
     <p:sldMasterId id="2147483660" r:id="rId1"/>
   </p:sldMasterIdLst>
   <p:notesMasterIdLst>
-    <p:notesMasterId r:id="rId12"/>
+    <p:notesMasterId r:id="rId13"/>
   </p:notesMasterIdLst>
   <p:handoutMasterIdLst>
-    <p:handoutMasterId r:id="rId13"/>
+    <p:handoutMasterId r:id="rId14"/>
   </p:handoutMasterIdLst>
   <p:sldIdLst>
     <p:sldId id="256" r:id="rId2"/>
@@ -16,11 +16,12 @@
     <p:sldId id="1140" r:id="rId4"/>
     <p:sldId id="1156" r:id="rId5"/>
     <p:sldId id="1154" r:id="rId6"/>
-    <p:sldId id="1153" r:id="rId7"/>
-    <p:sldId id="1145" r:id="rId8"/>
-    <p:sldId id="1157" r:id="rId9"/>
-    <p:sldId id="1158" r:id="rId10"/>
-    <p:sldId id="1159" r:id="rId11"/>
+    <p:sldId id="1160" r:id="rId7"/>
+    <p:sldId id="1153" r:id="rId8"/>
+    <p:sldId id="1145" r:id="rId9"/>
+    <p:sldId id="1157" r:id="rId10"/>
+    <p:sldId id="1158" r:id="rId11"/>
+    <p:sldId id="1159" r:id="rId12"/>
   </p:sldIdLst>
   <p:sldSz cx="12192000" cy="6858000"/>
   <p:notesSz cx="6858000" cy="9144000"/>
@@ -133,6 +134,7 @@
             <p14:sldId id="1140"/>
             <p14:sldId id="1156"/>
             <p14:sldId id="1154"/>
+            <p14:sldId id="1160"/>
             <p14:sldId id="1153"/>
             <p14:sldId id="1145"/>
             <p14:sldId id="1157"/>
@@ -262,7 +264,7 @@
                 <a:latin typeface="맑은 고딕" panose="020B0503020000020004" pitchFamily="50" charset="-127"/>
                 <a:ea typeface="맑은 고딕" panose="020B0503020000020004" pitchFamily="50" charset="-127"/>
               </a:rPr>
-              <a:t>2026-07-20</a:t>
+              <a:t>2026-08-20</a:t>
             </a:fld>
             <a:endParaRPr lang="ko-KR" altLang="en-US">
               <a:latin typeface="맑은 고딕" panose="020B0503020000020004" pitchFamily="50" charset="-127"/>
@@ -448,7 +450,7 @@
           <a:p>
             <a:fld id="{43E1C3DD-4A19-441D-907C-380838DB51C4}" type="datetime1">
               <a:rPr lang="ko-KR" altLang="en-US" noProof="0" smtClean="0"/>
-              <a:t>2026-07-20</a:t>
+              <a:t>2026-08-20</a:t>
             </a:fld>
             <a:endParaRPr lang="ko-KR" altLang="en-US" noProof="0"/>
           </a:p>
@@ -1296,7 +1298,7 @@
           <a:p>
             <a:fld id="{990475B5-67CA-4281-BDCA-DA943C3C8EB3}" type="datetime1">
               <a:rPr lang="ko-KR" altLang="en-US" noProof="0" smtClean="0"/>
-              <a:t>2026-07-20</a:t>
+              <a:t>2026-08-20</a:t>
             </a:fld>
             <a:endParaRPr lang="ko-KR" altLang="en-US" noProof="0"/>
           </a:p>
@@ -1950,7 +1952,7 @@
           <a:p>
             <a:fld id="{48A87A34-81AB-432B-8DAE-1953F412C126}" type="datetimeFigureOut">
               <a:rPr lang="en-US" smtClean="0"/>
-              <a:t>7/20/2026</a:t>
+              <a:t>8/20/2026</a:t>
             </a:fld>
             <a:endParaRPr lang="en-US" dirty="0"/>
           </a:p>
@@ -2246,7 +2248,7 @@
           <a:p>
             <a:fld id="{C655C81E-72E7-4D05-94B5-F45B321A525D}" type="datetime1">
               <a:rPr lang="ko-KR" altLang="en-US" noProof="0" smtClean="0"/>
-              <a:t>2026-07-20</a:t>
+              <a:t>2026-08-20</a:t>
             </a:fld>
             <a:endParaRPr lang="ko-KR" altLang="en-US" noProof="0" dirty="0">
               <a:latin typeface="맑은 고딕" panose="020B0503020000020004" pitchFamily="50" charset="-127"/>
@@ -3061,6 +3063,290 @@
         <p:cNvPr id="1" name="">
           <a:extLst>
             <a:ext uri="{FF2B5EF4-FFF2-40B4-BE49-F238E27FC236}">
+              <a16:creationId xmlns:a16="http://schemas.microsoft.com/office/drawing/2014/main" id="{23B2A533-72B2-EF6D-6238-026B9D67DB50}"/>
+            </a:ext>
+          </a:extLst>
+        </p:cNvPr>
+        <p:cNvGrpSpPr/>
+        <p:nvPr/>
+      </p:nvGrpSpPr>
+      <p:grpSpPr>
+        <a:xfrm>
+          <a:off x="0" y="0"/>
+          <a:ext cx="0" cy="0"/>
+          <a:chOff x="0" y="0"/>
+          <a:chExt cx="0" cy="0"/>
+        </a:xfrm>
+      </p:grpSpPr>
+      <p:sp>
+        <p:nvSpPr>
+          <p:cNvPr id="3" name="제목 1">
+            <a:extLst>
+              <a:ext uri="{FF2B5EF4-FFF2-40B4-BE49-F238E27FC236}">
+                <a16:creationId xmlns:a16="http://schemas.microsoft.com/office/drawing/2014/main" id="{9229008F-B6B9-EC20-092E-4C2A51F4DDEC}"/>
+              </a:ext>
+            </a:extLst>
+          </p:cNvPr>
+          <p:cNvSpPr txBox="1">
+            <a:spLocks/>
+          </p:cNvSpPr>
+          <p:nvPr/>
+        </p:nvSpPr>
+        <p:spPr>
+          <a:xfrm>
+            <a:off x="475645" y="481983"/>
+            <a:ext cx="10353762" cy="766439"/>
+          </a:xfrm>
+          <a:prstGeom prst="rect">
+            <a:avLst/>
+          </a:prstGeom>
+        </p:spPr>
+        <p:txBody>
+          <a:bodyPr vert="horz" lIns="91440" tIns="45720" rIns="91440" bIns="45720" rtlCol="0" anchor="ctr">
+            <a:normAutofit/>
+          </a:bodyPr>
+          <a:lstStyle>
+            <a:lvl1pPr algn="ctr" defTabSz="914400" rtl="0" eaLnBrk="1" latinLnBrk="1" hangingPunct="1">
+              <a:lnSpc>
+                <a:spcPct val="90000"/>
+              </a:lnSpc>
+              <a:spcBef>
+                <a:spcPct val="0"/>
+              </a:spcBef>
+              <a:buNone/>
+              <a:defRPr sz="3200" kern="1200" cap="all" baseline="0">
+                <a:solidFill>
+                  <a:schemeClr val="tx1"/>
+                </a:solidFill>
+                <a:effectLst/>
+                <a:latin typeface="Batang" panose="02030600000101010101" pitchFamily="18" charset="-127"/>
+                <a:ea typeface="Batang" panose="02030600000101010101" pitchFamily="18" charset="-127"/>
+                <a:cs typeface="+mj-cs"/>
+              </a:defRPr>
+            </a:lvl1pPr>
+          </a:lstStyle>
+          <a:p>
+            <a:pPr algn="l"/>
+            <a:r>
+              <a:rPr lang="en-US" altLang="ko-KR" sz="2800" cap="none" dirty="0">
+                <a:solidFill>
+                  <a:schemeClr val="bg2">
+                    <a:lumMod val="25000"/>
+                  </a:schemeClr>
+                </a:solidFill>
+                <a:latin typeface="D2Coding" panose="020B0609020101020101" pitchFamily="49" charset="-127"/>
+                <a:ea typeface="D2Coding" panose="020B0609020101020101" pitchFamily="49" charset="-127"/>
+                <a:cs typeface="Segoe UI Light" panose="020B0502040204020203" pitchFamily="34" charset="0"/>
+              </a:rPr>
+              <a:t>Architecture #2: Chain</a:t>
+            </a:r>
+            <a:endParaRPr lang="ko-KR" altLang="en-US" sz="2800" cap="none" dirty="0">
+              <a:solidFill>
+                <a:schemeClr val="bg2">
+                  <a:lumMod val="25000"/>
+                </a:schemeClr>
+              </a:solidFill>
+              <a:latin typeface="D2Coding" panose="020B0609020101020101" pitchFamily="49" charset="-127"/>
+              <a:ea typeface="D2Coding" panose="020B0609020101020101" pitchFamily="49" charset="-127"/>
+              <a:cs typeface="Segoe UI Light" panose="020B0502040204020203" pitchFamily="34" charset="0"/>
+            </a:endParaRPr>
+          </a:p>
+        </p:txBody>
+      </p:sp>
+      <p:sp>
+        <p:nvSpPr>
+          <p:cNvPr id="2" name="슬라이드 번호 개체 틀 3">
+            <a:extLst>
+              <a:ext uri="{FF2B5EF4-FFF2-40B4-BE49-F238E27FC236}">
+                <a16:creationId xmlns:a16="http://schemas.microsoft.com/office/drawing/2014/main" id="{ACD3F4E9-EF2D-B274-E5DA-7B48FA056692}"/>
+              </a:ext>
+            </a:extLst>
+          </p:cNvPr>
+          <p:cNvSpPr>
+            <a:spLocks noGrp="1"/>
+          </p:cNvSpPr>
+          <p:nvPr>
+            <p:ph type="sldNum" sz="quarter" idx="12"/>
+          </p:nvPr>
+        </p:nvSpPr>
+        <p:spPr>
+          <a:xfrm>
+            <a:off x="11177052" y="299420"/>
+            <a:ext cx="753545" cy="365125"/>
+          </a:xfrm>
+        </p:spPr>
+        <p:txBody>
+          <a:bodyPr/>
+          <a:lstStyle/>
+          <a:p>
+            <a:fld id="{D57F1E4F-1CFF-5643-939E-217C01CDF565}" type="slidenum">
+              <a:rPr lang="en-US" b="1" smtClean="0">
+                <a:latin typeface="Tw Cen MT" panose="020B0602020104020603" pitchFamily="34" charset="0"/>
+              </a:rPr>
+              <a:pPr/>
+              <a:t>10</a:t>
+            </a:fld>
+            <a:endParaRPr lang="en-US" b="1" dirty="0">
+              <a:latin typeface="Tw Cen MT" panose="020B0602020104020603" pitchFamily="34" charset="0"/>
+            </a:endParaRPr>
+          </a:p>
+        </p:txBody>
+      </p:sp>
+      <p:pic>
+        <p:nvPicPr>
+          <p:cNvPr id="5" name="그림 4">
+            <a:extLst>
+              <a:ext uri="{FF2B5EF4-FFF2-40B4-BE49-F238E27FC236}">
+                <a16:creationId xmlns:a16="http://schemas.microsoft.com/office/drawing/2014/main" id="{4C5B1EBE-2826-8603-F1F9-0E0E988BBFF8}"/>
+              </a:ext>
+            </a:extLst>
+          </p:cNvPr>
+          <p:cNvPicPr>
+            <a:picLocks noChangeAspect="1"/>
+          </p:cNvPicPr>
+          <p:nvPr/>
+        </p:nvPicPr>
+        <p:blipFill>
+          <a:blip r:embed="rId2"/>
+          <a:stretch>
+            <a:fillRect/>
+          </a:stretch>
+        </p:blipFill>
+        <p:spPr>
+          <a:xfrm>
+            <a:off x="4672315" y="2466821"/>
+            <a:ext cx="2179509" cy="3543607"/>
+          </a:xfrm>
+          <a:prstGeom prst="rect">
+            <a:avLst/>
+          </a:prstGeom>
+        </p:spPr>
+      </p:pic>
+      <p:sp>
+        <p:nvSpPr>
+          <p:cNvPr id="7" name="TextBox 6">
+            <a:extLst>
+              <a:ext uri="{FF2B5EF4-FFF2-40B4-BE49-F238E27FC236}">
+                <a16:creationId xmlns:a16="http://schemas.microsoft.com/office/drawing/2014/main" id="{F79F9566-4C01-7D2E-D410-70150E5DA57D}"/>
+              </a:ext>
+            </a:extLst>
+          </p:cNvPr>
+          <p:cNvSpPr txBox="1"/>
+          <p:nvPr/>
+        </p:nvSpPr>
+        <p:spPr>
+          <a:xfrm>
+            <a:off x="547385" y="1248422"/>
+            <a:ext cx="11087705" cy="793166"/>
+          </a:xfrm>
+          <a:prstGeom prst="rect">
+            <a:avLst/>
+          </a:prstGeom>
+          <a:noFill/>
+        </p:spPr>
+        <p:txBody>
+          <a:bodyPr wrap="square">
+            <a:spAutoFit/>
+          </a:bodyPr>
+          <a:lstStyle/>
+          <a:p>
+            <a:pPr>
+              <a:lnSpc>
+                <a:spcPct val="150000"/>
+              </a:lnSpc>
+              <a:buNone/>
+            </a:pPr>
+            <a:r>
+              <a:rPr lang="en-US" altLang="ko-KR" sz="1600" dirty="0">
+                <a:latin typeface="D2Coding" panose="020B0609020101020101" pitchFamily="49" charset="-127"/>
+                <a:ea typeface="D2Coding" panose="020B0609020101020101" pitchFamily="49" charset="-127"/>
+              </a:rPr>
+              <a:t>LLM</a:t>
+            </a:r>
+            <a:r>
+              <a:rPr lang="ko-KR" altLang="en-US" sz="1600" dirty="0">
+                <a:latin typeface="D2Coding" panose="020B0609020101020101" pitchFamily="49" charset="-127"/>
+                <a:ea typeface="D2Coding" panose="020B0609020101020101" pitchFamily="49" charset="-127"/>
+              </a:rPr>
+              <a:t> 애플리케이션이 실행될 때마다 입력 값과 결과는 달라지지만</a:t>
+            </a:r>
+            <a:r>
+              <a:rPr lang="en-US" altLang="ko-KR" sz="1600" dirty="0">
+                <a:latin typeface="D2Coding" panose="020B0609020101020101" pitchFamily="49" charset="-127"/>
+                <a:ea typeface="D2Coding" panose="020B0609020101020101" pitchFamily="49" charset="-127"/>
+              </a:rPr>
+              <a:t>, </a:t>
+            </a:r>
+            <a:r>
+              <a:rPr lang="ko-KR" altLang="en-US" sz="1600" dirty="0">
+                <a:latin typeface="D2Coding" panose="020B0609020101020101" pitchFamily="49" charset="-127"/>
+                <a:ea typeface="D2Coding" panose="020B0609020101020101" pitchFamily="49" charset="-127"/>
+              </a:rPr>
+              <a:t>여러 번의 </a:t>
+            </a:r>
+            <a:r>
+              <a:rPr lang="en-US" altLang="ko-KR" sz="1600" dirty="0">
+                <a:latin typeface="D2Coding" panose="020B0609020101020101" pitchFamily="49" charset="-127"/>
+                <a:ea typeface="D2Coding" panose="020B0609020101020101" pitchFamily="49" charset="-127"/>
+              </a:rPr>
+              <a:t>LLM </a:t>
+            </a:r>
+            <a:r>
+              <a:rPr lang="ko-KR" altLang="en-US" sz="1600" dirty="0">
+                <a:latin typeface="D2Coding" panose="020B0609020101020101" pitchFamily="49" charset="-127"/>
+                <a:ea typeface="D2Coding" panose="020B0609020101020101" pitchFamily="49" charset="-127"/>
+              </a:rPr>
+              <a:t>호출을 순차적으로 활용하여 </a:t>
+            </a:r>
+            <a:r>
+              <a:rPr lang="en-US" altLang="ko-KR" sz="1600" dirty="0">
+                <a:latin typeface="D2Coding" panose="020B0609020101020101" pitchFamily="49" charset="-127"/>
+                <a:ea typeface="D2Coding" panose="020B0609020101020101" pitchFamily="49" charset="-127"/>
+              </a:rPr>
+              <a:t>SQL </a:t>
+            </a:r>
+            <a:r>
+              <a:rPr lang="ko-KR" altLang="en-US" sz="1600" dirty="0">
+                <a:latin typeface="D2Coding" panose="020B0609020101020101" pitchFamily="49" charset="-127"/>
+                <a:ea typeface="D2Coding" panose="020B0609020101020101" pitchFamily="49" charset="-127"/>
+              </a:rPr>
+              <a:t>쿼리를 생성하여 더욱 정교한 애플리케이션을 </a:t>
+            </a:r>
+            <a:r>
+              <a:rPr lang="ko-KR" altLang="en-US" sz="1600" dirty="0" err="1">
+                <a:latin typeface="D2Coding" panose="020B0609020101020101" pitchFamily="49" charset="-127"/>
+                <a:ea typeface="D2Coding" panose="020B0609020101020101" pitchFamily="49" charset="-127"/>
+              </a:rPr>
+              <a:t>만듬</a:t>
+            </a:r>
+            <a:endParaRPr lang="en-US" altLang="ko-KR" sz="1600" dirty="0">
+              <a:latin typeface="D2Coding" panose="020B0609020101020101" pitchFamily="49" charset="-127"/>
+              <a:ea typeface="D2Coding" panose="020B0609020101020101" pitchFamily="49" charset="-127"/>
+            </a:endParaRPr>
+          </a:p>
+        </p:txBody>
+      </p:sp>
+    </p:spTree>
+    <p:extLst>
+      <p:ext uri="{BB962C8B-B14F-4D97-AF65-F5344CB8AC3E}">
+        <p14:creationId xmlns:p14="http://schemas.microsoft.com/office/powerpoint/2010/main" val="928237282"/>
+      </p:ext>
+    </p:extLst>
+  </p:cSld>
+  <p:clrMapOvr>
+    <a:masterClrMapping/>
+  </p:clrMapOvr>
+</p:sld>
+</file>
+
+<file path=ppt/slides/slide11.xml><?xml version="1.0" encoding="utf-8"?>
+<p:sld xmlns:a="http://schemas.openxmlformats.org/drawingml/2006/main" xmlns:r="http://schemas.openxmlformats.org/officeDocument/2006/relationships" xmlns:p="http://schemas.openxmlformats.org/presentationml/2006/main">
+  <p:cSld>
+    <p:spTree>
+      <p:nvGrpSpPr>
+        <p:cNvPr id="1" name="">
+          <a:extLst>
+            <a:ext uri="{FF2B5EF4-FFF2-40B4-BE49-F238E27FC236}">
               <a16:creationId xmlns:a16="http://schemas.microsoft.com/office/drawing/2014/main" id="{C8B25467-B24E-9742-3014-379C5C2676C6}"/>
             </a:ext>
           </a:extLst>
@@ -3182,7 +3468,7 @@
                 <a:latin typeface="Tw Cen MT" panose="020B0602020104020603" pitchFamily="34" charset="0"/>
               </a:rPr>
               <a:pPr/>
-              <a:t>10</a:t>
+              <a:t>11</a:t>
             </a:fld>
             <a:endParaRPr lang="en-US" b="1" dirty="0">
               <a:latin typeface="Tw Cen MT" panose="020B0602020104020603" pitchFamily="34" charset="0"/>
@@ -3825,7 +4111,7 @@
         </p:blipFill>
         <p:spPr bwMode="auto">
           <a:xfrm>
-            <a:off x="4090988" y="3771900"/>
+            <a:off x="4138613" y="3902987"/>
             <a:ext cx="3324225" cy="2493169"/>
           </a:xfrm>
           <a:prstGeom prst="rect">
@@ -3985,6 +4271,7 @@
             <a:solidFill>
               <a:schemeClr val="tx1"/>
             </a:solidFill>
+            <a:prstDash val="dash"/>
           </a:ln>
         </p:spPr>
         <p:txBody>
@@ -4060,13 +4347,15 @@
         </p:nvSpPr>
         <p:spPr>
           <a:xfrm>
-            <a:off x="1962669" y="4858523"/>
-            <a:ext cx="3332453" cy="615553"/>
+            <a:off x="2500725" y="4318574"/>
+            <a:ext cx="2328451" cy="830997"/>
           </a:xfrm>
           <a:prstGeom prst="rect">
             <a:avLst/>
           </a:prstGeom>
-          <a:noFill/>
+          <a:solidFill>
+            <a:schemeClr val="accent5"/>
+          </a:solidFill>
         </p:spPr>
         <p:txBody>
           <a:bodyPr wrap="square">
@@ -4077,6 +4366,9 @@
             <a:pPr algn="ctr"/>
             <a:r>
               <a:rPr lang="en-US" altLang="ko-KR" sz="2000" b="1" dirty="0">
+                <a:solidFill>
+                  <a:schemeClr val="bg1"/>
+                </a:solidFill>
                 <a:latin typeface="D2Coding" panose="020B0609020101020101" pitchFamily="49" charset="-127"/>
                 <a:ea typeface="D2Coding" panose="020B0609020101020101" pitchFamily="49" charset="-127"/>
               </a:rPr>
@@ -4084,6 +4376,9 @@
             </a:r>
             <a:r>
               <a:rPr lang="en-US" altLang="ko-KR" sz="1400" dirty="0">
+                <a:solidFill>
+                  <a:schemeClr val="bg1"/>
+                </a:solidFill>
                 <a:latin typeface="D2Coding" panose="020B0609020101020101" pitchFamily="49" charset="-127"/>
                 <a:ea typeface="D2Coding" panose="020B0609020101020101" pitchFamily="49" charset="-127"/>
               </a:rPr>
@@ -4094,12 +4389,18 @@
             <a:pPr algn="ctr"/>
             <a:r>
               <a:rPr lang="en-US" altLang="ko-KR" sz="1400" dirty="0">
+                <a:solidFill>
+                  <a:schemeClr val="bg1"/>
+                </a:solidFill>
                 <a:latin typeface="D2Coding" panose="020B0609020101020101" pitchFamily="49" charset="-127"/>
                 <a:ea typeface="D2Coding" panose="020B0609020101020101" pitchFamily="49" charset="-127"/>
               </a:rPr>
               <a:t>(The capacity to act autonomously)</a:t>
             </a:r>
             <a:endParaRPr lang="ko-KR" altLang="en-US" sz="1400" dirty="0">
+              <a:solidFill>
+                <a:schemeClr val="bg1"/>
+              </a:solidFill>
               <a:latin typeface="D2Coding" panose="020B0609020101020101" pitchFamily="49" charset="-127"/>
               <a:ea typeface="D2Coding" panose="020B0609020101020101" pitchFamily="49" charset="-127"/>
             </a:endParaRPr>
@@ -4120,13 +4421,15 @@
         </p:nvSpPr>
         <p:spPr>
           <a:xfrm>
-            <a:off x="5943600" y="5474076"/>
-            <a:ext cx="4390507" cy="584775"/>
+            <a:off x="6753226" y="4955460"/>
+            <a:ext cx="2743200" cy="800219"/>
           </a:xfrm>
           <a:prstGeom prst="rect">
             <a:avLst/>
           </a:prstGeom>
-          <a:noFill/>
+          <a:solidFill>
+            <a:srgbClr val="FF0000"/>
+          </a:solidFill>
         </p:spPr>
         <p:txBody>
           <a:bodyPr wrap="square">
@@ -4137,6 +4440,9 @@
             <a:pPr algn="ctr"/>
             <a:r>
               <a:rPr lang="en-US" altLang="ko-KR" b="1" dirty="0">
+                <a:solidFill>
+                  <a:schemeClr val="bg1"/>
+                </a:solidFill>
                 <a:latin typeface="D2Coding" panose="020B0609020101020101" pitchFamily="49" charset="-127"/>
                 <a:ea typeface="D2Coding" panose="020B0609020101020101" pitchFamily="49" charset="-127"/>
               </a:rPr>
@@ -4147,12 +4453,18 @@
             <a:pPr algn="ctr"/>
             <a:r>
               <a:rPr lang="en-US" altLang="ko-KR" sz="1400" dirty="0">
+                <a:solidFill>
+                  <a:schemeClr val="bg1"/>
+                </a:solidFill>
                 <a:latin typeface="D2Coding" panose="020B0609020101020101" pitchFamily="49" charset="-127"/>
                 <a:ea typeface="D2Coding" panose="020B0609020101020101" pitchFamily="49" charset="-127"/>
               </a:rPr>
               <a:t>(The degree to which you can trust its outputs)</a:t>
             </a:r>
             <a:endParaRPr lang="ko-KR" altLang="en-US" sz="1400" dirty="0">
+              <a:solidFill>
+                <a:schemeClr val="bg1"/>
+              </a:solidFill>
               <a:latin typeface="D2Coding" panose="020B0609020101020101" pitchFamily="49" charset="-127"/>
               <a:ea typeface="D2Coding" panose="020B0609020101020101" pitchFamily="49" charset="-127"/>
             </a:endParaRPr>
@@ -4215,8 +4527,8 @@
         </p:nvSpPr>
         <p:spPr>
           <a:xfrm>
-            <a:off x="7734300" y="1559580"/>
-            <a:ext cx="3095107" cy="1901161"/>
+            <a:off x="7734300" y="1502430"/>
+            <a:ext cx="3819525" cy="2353401"/>
           </a:xfrm>
           <a:prstGeom prst="rect">
             <a:avLst/>
@@ -4235,19 +4547,97 @@
               </a:lnSpc>
             </a:pPr>
             <a:r>
-              <a:rPr lang="en-US" altLang="ko-KR" sz="1600" dirty="0">
-                <a:latin typeface="D2Coding" panose="020B0609020101020101" pitchFamily="49" charset="-127"/>
-                <a:ea typeface="D2Coding" panose="020B0609020101020101" pitchFamily="49" charset="-127"/>
-              </a:rPr>
-              <a:t>The next question should be: How do we assemble these pieces into a coherent application that achieves the goal we set out to solve?</a:t>
-            </a:r>
-            <a:endParaRPr lang="ko-KR" altLang="en-US" sz="1600" dirty="0">
+              <a:rPr lang="en-US" altLang="ko-KR" sz="2000" i="1" dirty="0">
+                <a:latin typeface="D2Coding" panose="020B0609020101020101" pitchFamily="49" charset="-127"/>
+                <a:ea typeface="D2Coding" panose="020B0609020101020101" pitchFamily="49" charset="-127"/>
+              </a:rPr>
+              <a:t>The next question should be</a:t>
+            </a:r>
+            <a:r>
+              <a:rPr lang="en-US" altLang="ko-KR" sz="2000" dirty="0">
+                <a:latin typeface="D2Coding" panose="020B0609020101020101" pitchFamily="49" charset="-127"/>
+                <a:ea typeface="D2Coding" panose="020B0609020101020101" pitchFamily="49" charset="-127"/>
+              </a:rPr>
+              <a:t>: </a:t>
+            </a:r>
+            <a:endParaRPr lang="en-US" altLang="ko-KR" sz="1600" dirty="0">
               <a:latin typeface="D2Coding" panose="020B0609020101020101" pitchFamily="49" charset="-127"/>
               <a:ea typeface="D2Coding" panose="020B0609020101020101" pitchFamily="49" charset="-127"/>
             </a:endParaRPr>
           </a:p>
+          <a:p>
+            <a:pPr algn="ctr">
+              <a:lnSpc>
+                <a:spcPct val="150000"/>
+              </a:lnSpc>
+            </a:pPr>
+            <a:r>
+              <a:rPr lang="en-US" altLang="ko-KR" sz="2000" b="1" i="1" dirty="0">
+                <a:solidFill>
+                  <a:schemeClr val="accent1"/>
+                </a:solidFill>
+                <a:latin typeface="D2Coding" panose="020B0609020101020101" pitchFamily="49" charset="-127"/>
+                <a:ea typeface="D2Coding" panose="020B0609020101020101" pitchFamily="49" charset="-127"/>
+              </a:rPr>
+              <a:t>How do we assemble these pieces into a coherent application that achieves the goal we set out to solve?</a:t>
+            </a:r>
+            <a:endParaRPr lang="ko-KR" altLang="en-US" sz="1600" b="1" i="1" dirty="0">
+              <a:solidFill>
+                <a:schemeClr val="accent1"/>
+              </a:solidFill>
+              <a:latin typeface="D2Coding" panose="020B0609020101020101" pitchFamily="49" charset="-127"/>
+              <a:ea typeface="D2Coding" panose="020B0609020101020101" pitchFamily="49" charset="-127"/>
+            </a:endParaRPr>
+          </a:p>
         </p:txBody>
       </p:sp>
+      <p:cxnSp>
+        <p:nvCxnSpPr>
+          <p:cNvPr id="6" name="연결선: 꺾임 5">
+            <a:extLst>
+              <a:ext uri="{FF2B5EF4-FFF2-40B4-BE49-F238E27FC236}">
+                <a16:creationId xmlns:a16="http://schemas.microsoft.com/office/drawing/2014/main" id="{4A7F358A-1EDB-BD14-B8FE-7B2AE5B8011B}"/>
+              </a:ext>
+            </a:extLst>
+          </p:cNvPr>
+          <p:cNvCxnSpPr>
+            <a:cxnSpLocks/>
+            <a:stCxn id="8" idx="2"/>
+            <a:endCxn id="9" idx="2"/>
+          </p:cNvCxnSpPr>
+          <p:nvPr/>
+        </p:nvCxnSpPr>
+        <p:spPr>
+          <a:xfrm rot="16200000" flipH="1">
+            <a:off x="5591834" y="3222687"/>
+            <a:ext cx="606108" cy="4459875"/>
+          </a:xfrm>
+          <a:prstGeom prst="bentConnector3">
+            <a:avLst>
+              <a:gd name="adj1" fmla="val 137716"/>
+            </a:avLst>
+          </a:prstGeom>
+          <a:ln>
+            <a:solidFill>
+              <a:schemeClr val="tx1"/>
+            </a:solidFill>
+          </a:ln>
+        </p:spPr>
+        <p:style>
+          <a:lnRef idx="1">
+            <a:schemeClr val="accent1"/>
+          </a:lnRef>
+          <a:fillRef idx="0">
+            <a:schemeClr val="accent1"/>
+          </a:fillRef>
+          <a:effectRef idx="0">
+            <a:schemeClr val="accent1"/>
+          </a:effectRef>
+          <a:fontRef idx="minor">
+            <a:schemeClr val="tx1"/>
+          </a:fontRef>
+        </p:style>
+      </p:cxnSp>
     </p:spTree>
     <p:extLst>
       <p:ext uri="{BB962C8B-B14F-4D97-AF65-F5344CB8AC3E}">
@@ -4490,7 +4880,7 @@
                 <a:latin typeface="D2Coding" panose="020B0609020101020101" pitchFamily="49" charset="-127"/>
                 <a:ea typeface="D2Coding" panose="020B0609020101020101" pitchFamily="49" charset="-127"/>
               </a:rPr>
-              <a:t>에 의해 결정되는지 평가하는 것</a:t>
+              <a:t>에 의해 결정되는지 결정하는 것</a:t>
             </a:r>
             <a:endParaRPr lang="en-US" altLang="ko-KR" sz="1600" dirty="0">
               <a:latin typeface="D2Coding" panose="020B0609020101020101" pitchFamily="49" charset="-127"/>
@@ -4839,9 +5229,83 @@
                 <a:latin typeface="D2Coding" panose="020B0609020101020101" pitchFamily="49" charset="-127"/>
                 <a:ea typeface="D2Coding" panose="020B0609020101020101" pitchFamily="49" charset="-127"/>
               </a:rPr>
-              <a:t>)."</a:t>
+              <a:t>)</a:t>
             </a:r>
             <a:endParaRPr lang="ko-KR" altLang="en-US" sz="1600" dirty="0">
+              <a:latin typeface="D2Coding" panose="020B0609020101020101" pitchFamily="49" charset="-127"/>
+              <a:ea typeface="D2Coding" panose="020B0609020101020101" pitchFamily="49" charset="-127"/>
+            </a:endParaRPr>
+          </a:p>
+        </p:txBody>
+      </p:sp>
+      <p:sp>
+        <p:nvSpPr>
+          <p:cNvPr id="2" name="TextBox 1">
+            <a:extLst>
+              <a:ext uri="{FF2B5EF4-FFF2-40B4-BE49-F238E27FC236}">
+                <a16:creationId xmlns:a16="http://schemas.microsoft.com/office/drawing/2014/main" id="{2780FEA8-5DC3-650D-CCA9-4562FCDDF01A}"/>
+              </a:ext>
+            </a:extLst>
+          </p:cNvPr>
+          <p:cNvSpPr txBox="1"/>
+          <p:nvPr/>
+        </p:nvSpPr>
+        <p:spPr>
+          <a:xfrm>
+            <a:off x="9225373" y="327995"/>
+            <a:ext cx="2328451" cy="830997"/>
+          </a:xfrm>
+          <a:prstGeom prst="rect">
+            <a:avLst/>
+          </a:prstGeom>
+          <a:solidFill>
+            <a:schemeClr val="accent5"/>
+          </a:solidFill>
+        </p:spPr>
+        <p:txBody>
+          <a:bodyPr wrap="square">
+            <a:spAutoFit/>
+          </a:bodyPr>
+          <a:lstStyle/>
+          <a:p>
+            <a:pPr algn="ctr"/>
+            <a:r>
+              <a:rPr lang="en-US" altLang="ko-KR" sz="2000" b="1" dirty="0">
+                <a:solidFill>
+                  <a:schemeClr val="bg1"/>
+                </a:solidFill>
+                <a:latin typeface="D2Coding" panose="020B0609020101020101" pitchFamily="49" charset="-127"/>
+                <a:ea typeface="D2Coding" panose="020B0609020101020101" pitchFamily="49" charset="-127"/>
+              </a:rPr>
+              <a:t>Agency</a:t>
+            </a:r>
+            <a:r>
+              <a:rPr lang="en-US" altLang="ko-KR" sz="1400" dirty="0">
+                <a:solidFill>
+                  <a:schemeClr val="bg1"/>
+                </a:solidFill>
+                <a:latin typeface="D2Coding" panose="020B0609020101020101" pitchFamily="49" charset="-127"/>
+                <a:ea typeface="D2Coding" panose="020B0609020101020101" pitchFamily="49" charset="-127"/>
+              </a:rPr>
+              <a:t> </a:t>
+            </a:r>
+          </a:p>
+          <a:p>
+            <a:pPr algn="ctr"/>
+            <a:r>
+              <a:rPr lang="en-US" altLang="ko-KR" sz="1400" dirty="0">
+                <a:solidFill>
+                  <a:schemeClr val="bg1"/>
+                </a:solidFill>
+                <a:latin typeface="D2Coding" panose="020B0609020101020101" pitchFamily="49" charset="-127"/>
+                <a:ea typeface="D2Coding" panose="020B0609020101020101" pitchFamily="49" charset="-127"/>
+              </a:rPr>
+              <a:t>(The capacity to act autonomously)</a:t>
+            </a:r>
+            <a:endParaRPr lang="ko-KR" altLang="en-US" sz="1400" dirty="0">
+              <a:solidFill>
+                <a:schemeClr val="bg1"/>
+              </a:solidFill>
               <a:latin typeface="D2Coding" panose="020B0609020101020101" pitchFamily="49" charset="-127"/>
               <a:ea typeface="D2Coding" panose="020B0609020101020101" pitchFamily="49" charset="-127"/>
             </a:endParaRPr>
@@ -5013,7 +5477,7 @@
         <p:spPr>
           <a:xfrm>
             <a:off x="576262" y="1286522"/>
-            <a:ext cx="11039476" cy="2308324"/>
+            <a:ext cx="11039476" cy="2954655"/>
           </a:xfrm>
           <a:prstGeom prst="rect">
             <a:avLst/>
@@ -5031,21 +5495,21 @@
               <a:buChar char="v"/>
             </a:pPr>
             <a:r>
-              <a:rPr lang="ko-KR" altLang="en-US" sz="1600" dirty="0">
+              <a:rPr lang="ko-KR" altLang="en-US" sz="2000" dirty="0">
                 <a:latin typeface="D2Coding" panose="020B0609020101020101" pitchFamily="49" charset="-127"/>
                 <a:ea typeface="D2Coding" panose="020B0609020101020101" pitchFamily="49" charset="-127"/>
               </a:rPr>
               <a:t>분류 기준 (자율성 스펙트럼</a:t>
             </a:r>
             <a:r>
-              <a:rPr lang="en-US" altLang="ko-KR" sz="1600" dirty="0">
+              <a:rPr lang="en-US" altLang="ko-KR" sz="2000" dirty="0">
                 <a:latin typeface="D2Coding" panose="020B0609020101020101" pitchFamily="49" charset="-127"/>
                 <a:ea typeface="D2Coding" panose="020B0609020101020101" pitchFamily="49" charset="-127"/>
               </a:rPr>
               <a:t>_the degree of autonomy</a:t>
             </a:r>
             <a:r>
-              <a:rPr lang="ko-KR" altLang="en-US" sz="1600" dirty="0">
+              <a:rPr lang="ko-KR" altLang="en-US" sz="2000" dirty="0">
                 <a:latin typeface="D2Coding" panose="020B0609020101020101" pitchFamily="49" charset="-127"/>
                 <a:ea typeface="D2Coding" panose="020B0609020101020101" pitchFamily="49" charset="-127"/>
               </a:rPr>
@@ -5068,27 +5532,40 @@
               <a:buChar char="v"/>
             </a:pPr>
             <a:r>
-              <a:rPr lang="ko-KR" altLang="en-US" sz="1600" dirty="0">
+              <a:rPr lang="ko-KR" altLang="en-US" dirty="0">
                 <a:latin typeface="D2Coding" panose="020B0609020101020101" pitchFamily="49" charset="-127"/>
                 <a:ea typeface="D2Coding" panose="020B0609020101020101" pitchFamily="49" charset="-127"/>
               </a:rPr>
               <a:t>시스템 제어권을 개발자가 쥐고 있는지, </a:t>
             </a:r>
             <a:r>
-              <a:rPr lang="ko-KR" altLang="en-US" sz="1600" dirty="0" err="1">
+              <a:rPr lang="ko-KR" altLang="en-US" dirty="0" err="1">
                 <a:latin typeface="D2Coding" panose="020B0609020101020101" pitchFamily="49" charset="-127"/>
                 <a:ea typeface="D2Coding" panose="020B0609020101020101" pitchFamily="49" charset="-127"/>
               </a:rPr>
               <a:t>LLM이</a:t>
             </a:r>
             <a:r>
-              <a:rPr lang="ko-KR" altLang="en-US" sz="1600" dirty="0">
+              <a:rPr lang="ko-KR" altLang="en-US" dirty="0">
                 <a:latin typeface="D2Coding" panose="020B0609020101020101" pitchFamily="49" charset="-127"/>
                 <a:ea typeface="D2Coding" panose="020B0609020101020101" pitchFamily="49" charset="-127"/>
               </a:rPr>
               <a:t> 주도하는지 단계별로 구분함</a:t>
             </a:r>
-            <a:endParaRPr lang="en-US" altLang="ko-KR" sz="1600" dirty="0">
+            <a:endParaRPr lang="en-US" altLang="ko-KR" dirty="0">
+              <a:latin typeface="D2Coding" panose="020B0609020101020101" pitchFamily="49" charset="-127"/>
+              <a:ea typeface="D2Coding" panose="020B0609020101020101" pitchFamily="49" charset="-127"/>
+            </a:endParaRPr>
+          </a:p>
+          <a:p>
+            <a:pPr marL="742950" lvl="1" indent="-285750">
+              <a:lnSpc>
+                <a:spcPct val="200000"/>
+              </a:lnSpc>
+              <a:buFont typeface="Wingdings" panose="05000000000000000000" pitchFamily="2" charset="2"/>
+              <a:buChar char="v"/>
+            </a:pPr>
+            <a:endParaRPr lang="en-US" altLang="ko-KR" dirty="0">
               <a:latin typeface="D2Coding" panose="020B0609020101020101" pitchFamily="49" charset="-127"/>
               <a:ea typeface="D2Coding" panose="020B0609020101020101" pitchFamily="49" charset="-127"/>
             </a:endParaRPr>
@@ -5220,6 +5697,80 @@
               </a:rPr>
               <a:t> 단계별로 생각하도록 유도하는 프롬프트 호출 과정</a:t>
             </a:r>
+          </a:p>
+        </p:txBody>
+      </p:sp>
+      <p:sp>
+        <p:nvSpPr>
+          <p:cNvPr id="5" name="TextBox 4">
+            <a:extLst>
+              <a:ext uri="{FF2B5EF4-FFF2-40B4-BE49-F238E27FC236}">
+                <a16:creationId xmlns:a16="http://schemas.microsoft.com/office/drawing/2014/main" id="{E1CF205B-EA3E-3E7A-00FE-B03B9FE4692E}"/>
+              </a:ext>
+            </a:extLst>
+          </p:cNvPr>
+          <p:cNvSpPr txBox="1"/>
+          <p:nvPr/>
+        </p:nvSpPr>
+        <p:spPr>
+          <a:xfrm>
+            <a:off x="9225373" y="327995"/>
+            <a:ext cx="2328451" cy="830997"/>
+          </a:xfrm>
+          <a:prstGeom prst="rect">
+            <a:avLst/>
+          </a:prstGeom>
+          <a:solidFill>
+            <a:schemeClr val="accent5"/>
+          </a:solidFill>
+        </p:spPr>
+        <p:txBody>
+          <a:bodyPr wrap="square">
+            <a:spAutoFit/>
+          </a:bodyPr>
+          <a:lstStyle/>
+          <a:p>
+            <a:pPr algn="ctr"/>
+            <a:r>
+              <a:rPr lang="en-US" altLang="ko-KR" sz="2000" b="1" dirty="0">
+                <a:solidFill>
+                  <a:schemeClr val="bg1"/>
+                </a:solidFill>
+                <a:latin typeface="D2Coding" panose="020B0609020101020101" pitchFamily="49" charset="-127"/>
+                <a:ea typeface="D2Coding" panose="020B0609020101020101" pitchFamily="49" charset="-127"/>
+              </a:rPr>
+              <a:t>Agency</a:t>
+            </a:r>
+            <a:r>
+              <a:rPr lang="en-US" altLang="ko-KR" sz="1400" dirty="0">
+                <a:solidFill>
+                  <a:schemeClr val="bg1"/>
+                </a:solidFill>
+                <a:latin typeface="D2Coding" panose="020B0609020101020101" pitchFamily="49" charset="-127"/>
+                <a:ea typeface="D2Coding" panose="020B0609020101020101" pitchFamily="49" charset="-127"/>
+              </a:rPr>
+              <a:t> </a:t>
+            </a:r>
+          </a:p>
+          <a:p>
+            <a:pPr algn="ctr"/>
+            <a:r>
+              <a:rPr lang="en-US" altLang="ko-KR" sz="1400" dirty="0">
+                <a:solidFill>
+                  <a:schemeClr val="bg1"/>
+                </a:solidFill>
+                <a:latin typeface="D2Coding" panose="020B0609020101020101" pitchFamily="49" charset="-127"/>
+                <a:ea typeface="D2Coding" panose="020B0609020101020101" pitchFamily="49" charset="-127"/>
+              </a:rPr>
+              <a:t>(The capacity to act autonomously)</a:t>
+            </a:r>
+            <a:endParaRPr lang="ko-KR" altLang="en-US" sz="1400" dirty="0">
+              <a:solidFill>
+                <a:schemeClr val="bg1"/>
+              </a:solidFill>
+              <a:latin typeface="D2Coding" panose="020B0609020101020101" pitchFamily="49" charset="-127"/>
+              <a:ea typeface="D2Coding" panose="020B0609020101020101" pitchFamily="49" charset="-127"/>
+            </a:endParaRPr>
           </a:p>
         </p:txBody>
       </p:sp>
@@ -5237,6 +5788,552 @@
 </file>
 
 <file path=ppt/slides/slide6.xml><?xml version="1.0" encoding="utf-8"?>
+<p:sld xmlns:a="http://schemas.openxmlformats.org/drawingml/2006/main" xmlns:r="http://schemas.openxmlformats.org/officeDocument/2006/relationships" xmlns:p="http://schemas.openxmlformats.org/presentationml/2006/main">
+  <p:cSld>
+    <p:spTree>
+      <p:nvGrpSpPr>
+        <p:cNvPr id="1" name="">
+          <a:extLst>
+            <a:ext uri="{FF2B5EF4-FFF2-40B4-BE49-F238E27FC236}">
+              <a16:creationId xmlns:a16="http://schemas.microsoft.com/office/drawing/2014/main" id="{A5BB373C-E534-D23F-6F67-E61E311286CA}"/>
+            </a:ext>
+          </a:extLst>
+        </p:cNvPr>
+        <p:cNvGrpSpPr/>
+        <p:nvPr/>
+      </p:nvGrpSpPr>
+      <p:grpSpPr>
+        <a:xfrm>
+          <a:off x="0" y="0"/>
+          <a:ext cx="0" cy="0"/>
+          <a:chOff x="0" y="0"/>
+          <a:chExt cx="0" cy="0"/>
+        </a:xfrm>
+      </p:grpSpPr>
+      <p:sp>
+        <p:nvSpPr>
+          <p:cNvPr id="4" name="슬라이드 번호 개체 틀 3">
+            <a:extLst>
+              <a:ext uri="{FF2B5EF4-FFF2-40B4-BE49-F238E27FC236}">
+                <a16:creationId xmlns:a16="http://schemas.microsoft.com/office/drawing/2014/main" id="{65308DD3-7DCA-BE3D-369C-B6CAE3AB883B}"/>
+              </a:ext>
+            </a:extLst>
+          </p:cNvPr>
+          <p:cNvSpPr>
+            <a:spLocks noGrp="1"/>
+          </p:cNvSpPr>
+          <p:nvPr>
+            <p:ph type="sldNum" sz="quarter" idx="12"/>
+          </p:nvPr>
+        </p:nvSpPr>
+        <p:spPr>
+          <a:xfrm>
+            <a:off x="11177052" y="299420"/>
+            <a:ext cx="753545" cy="365125"/>
+          </a:xfrm>
+        </p:spPr>
+        <p:txBody>
+          <a:bodyPr/>
+          <a:lstStyle/>
+          <a:p>
+            <a:fld id="{D57F1E4F-1CFF-5643-939E-217C01CDF565}" type="slidenum">
+              <a:rPr lang="en-US" sz="1400" b="1" smtClean="0">
+                <a:latin typeface="Tw Cen MT" panose="020B0602020104020603" pitchFamily="34" charset="0"/>
+              </a:rPr>
+              <a:pPr/>
+              <a:t>6</a:t>
+            </a:fld>
+            <a:endParaRPr lang="en-US" sz="1400" b="1" dirty="0">
+              <a:latin typeface="Tw Cen MT" panose="020B0602020104020603" pitchFamily="34" charset="0"/>
+            </a:endParaRPr>
+          </a:p>
+        </p:txBody>
+      </p:sp>
+      <p:sp>
+        <p:nvSpPr>
+          <p:cNvPr id="3" name="제목 1">
+            <a:extLst>
+              <a:ext uri="{FF2B5EF4-FFF2-40B4-BE49-F238E27FC236}">
+                <a16:creationId xmlns:a16="http://schemas.microsoft.com/office/drawing/2014/main" id="{DA1EFBD1-7CAE-B015-FBB4-DC4124A0FDCE}"/>
+              </a:ext>
+            </a:extLst>
+          </p:cNvPr>
+          <p:cNvSpPr txBox="1">
+            <a:spLocks/>
+          </p:cNvSpPr>
+          <p:nvPr/>
+        </p:nvSpPr>
+        <p:spPr>
+          <a:xfrm>
+            <a:off x="475645" y="481983"/>
+            <a:ext cx="10353762" cy="766439"/>
+          </a:xfrm>
+          <a:prstGeom prst="rect">
+            <a:avLst/>
+          </a:prstGeom>
+        </p:spPr>
+        <p:txBody>
+          <a:bodyPr vert="horz" lIns="91440" tIns="45720" rIns="91440" bIns="45720" rtlCol="0" anchor="ctr">
+            <a:normAutofit/>
+          </a:bodyPr>
+          <a:lstStyle>
+            <a:lvl1pPr algn="ctr" defTabSz="914400" rtl="0" eaLnBrk="1" latinLnBrk="1" hangingPunct="1">
+              <a:lnSpc>
+                <a:spcPct val="90000"/>
+              </a:lnSpc>
+              <a:spcBef>
+                <a:spcPct val="0"/>
+              </a:spcBef>
+              <a:buNone/>
+              <a:defRPr sz="3200" kern="1200" cap="all" baseline="0">
+                <a:solidFill>
+                  <a:schemeClr val="tx1"/>
+                </a:solidFill>
+                <a:effectLst/>
+                <a:latin typeface="Batang" panose="02030600000101010101" pitchFamily="18" charset="-127"/>
+                <a:ea typeface="Batang" panose="02030600000101010101" pitchFamily="18" charset="-127"/>
+                <a:cs typeface="+mj-cs"/>
+              </a:defRPr>
+            </a:lvl1pPr>
+          </a:lstStyle>
+          <a:p>
+            <a:pPr algn="l"/>
+            <a:r>
+              <a:rPr lang="ko-KR" altLang="en-US" sz="2800" cap="none" dirty="0">
+                <a:solidFill>
+                  <a:schemeClr val="bg2">
+                    <a:lumMod val="25000"/>
+                  </a:schemeClr>
+                </a:solidFill>
+                <a:latin typeface="D2Coding" panose="020B0609020101020101" pitchFamily="49" charset="-127"/>
+                <a:ea typeface="D2Coding" panose="020B0609020101020101" pitchFamily="49" charset="-127"/>
+                <a:cs typeface="Segoe UI Light" panose="020B0502040204020203" pitchFamily="34" charset="0"/>
+              </a:rPr>
+              <a:t>자율성 스펙트럼</a:t>
+            </a:r>
+            <a:r>
+              <a:rPr lang="en-US" altLang="ko-KR" sz="2800" cap="none" dirty="0">
+                <a:solidFill>
+                  <a:schemeClr val="bg2">
+                    <a:lumMod val="25000"/>
+                  </a:schemeClr>
+                </a:solidFill>
+                <a:latin typeface="D2Coding" panose="020B0609020101020101" pitchFamily="49" charset="-127"/>
+                <a:ea typeface="D2Coding" panose="020B0609020101020101" pitchFamily="49" charset="-127"/>
+                <a:cs typeface="Segoe UI Light" panose="020B0502040204020203" pitchFamily="34" charset="0"/>
+              </a:rPr>
+              <a:t>_the degree of autonomy</a:t>
+            </a:r>
+            <a:endParaRPr lang="ko-KR" altLang="en-US" sz="2800" cap="none" dirty="0">
+              <a:solidFill>
+                <a:schemeClr val="bg2">
+                  <a:lumMod val="25000"/>
+                </a:schemeClr>
+              </a:solidFill>
+              <a:latin typeface="D2Coding" panose="020B0609020101020101" pitchFamily="49" charset="-127"/>
+              <a:ea typeface="D2Coding" panose="020B0609020101020101" pitchFamily="49" charset="-127"/>
+              <a:cs typeface="Segoe UI Light" panose="020B0502040204020203" pitchFamily="34" charset="0"/>
+            </a:endParaRPr>
+          </a:p>
+        </p:txBody>
+      </p:sp>
+      <p:sp>
+        <p:nvSpPr>
+          <p:cNvPr id="7" name="TextBox 6">
+            <a:extLst>
+              <a:ext uri="{FF2B5EF4-FFF2-40B4-BE49-F238E27FC236}">
+                <a16:creationId xmlns:a16="http://schemas.microsoft.com/office/drawing/2014/main" id="{E9C6A7EC-276F-20A2-76DB-E5AE2A5FBBD7}"/>
+              </a:ext>
+            </a:extLst>
+          </p:cNvPr>
+          <p:cNvSpPr txBox="1"/>
+          <p:nvPr/>
+        </p:nvSpPr>
+        <p:spPr>
+          <a:xfrm>
+            <a:off x="576262" y="1210322"/>
+            <a:ext cx="11039476" cy="1254831"/>
+          </a:xfrm>
+          <a:prstGeom prst="rect">
+            <a:avLst/>
+          </a:prstGeom>
+          <a:noFill/>
+        </p:spPr>
+        <p:txBody>
+          <a:bodyPr wrap="square">
+            <a:spAutoFit/>
+          </a:bodyPr>
+          <a:lstStyle/>
+          <a:p>
+            <a:pPr marL="285750" indent="-285750">
+              <a:lnSpc>
+                <a:spcPct val="150000"/>
+              </a:lnSpc>
+              <a:buFont typeface="Wingdings" panose="05000000000000000000" pitchFamily="2" charset="2"/>
+              <a:buChar char="v"/>
+            </a:pPr>
+            <a:r>
+              <a:rPr lang="ko-KR" altLang="en-US" dirty="0">
+                <a:latin typeface="D2Coding" panose="020B0609020101020101" pitchFamily="49" charset="-127"/>
+                <a:ea typeface="D2Coding" panose="020B0609020101020101" pitchFamily="49" charset="-127"/>
+              </a:rPr>
+              <a:t>시스템 제어권을 개발자가 쥐고 있는지, </a:t>
+            </a:r>
+            <a:r>
+              <a:rPr lang="ko-KR" altLang="en-US" dirty="0" err="1">
+                <a:latin typeface="D2Coding" panose="020B0609020101020101" pitchFamily="49" charset="-127"/>
+                <a:ea typeface="D2Coding" panose="020B0609020101020101" pitchFamily="49" charset="-127"/>
+              </a:rPr>
+              <a:t>LLM이</a:t>
+            </a:r>
+            <a:r>
+              <a:rPr lang="ko-KR" altLang="en-US" dirty="0">
+                <a:latin typeface="D2Coding" panose="020B0609020101020101" pitchFamily="49" charset="-127"/>
+                <a:ea typeface="D2Coding" panose="020B0609020101020101" pitchFamily="49" charset="-127"/>
+              </a:rPr>
+              <a:t> 주도하는지 단계별로 자율성</a:t>
+            </a:r>
+            <a:r>
+              <a:rPr lang="en-US" altLang="ko-KR" dirty="0">
+                <a:latin typeface="D2Coding" panose="020B0609020101020101" pitchFamily="49" charset="-127"/>
+                <a:ea typeface="D2Coding" panose="020B0609020101020101" pitchFamily="49" charset="-127"/>
+              </a:rPr>
+              <a:t> </a:t>
+            </a:r>
+            <a:r>
+              <a:rPr lang="ko-KR" altLang="en-US" dirty="0">
+                <a:latin typeface="D2Coding" panose="020B0609020101020101" pitchFamily="49" charset="-127"/>
+                <a:ea typeface="D2Coding" panose="020B0609020101020101" pitchFamily="49" charset="-127"/>
+              </a:rPr>
+              <a:t>스펙트럼을</a:t>
+            </a:r>
+            <a:r>
+              <a:rPr lang="en-US" altLang="ko-KR" dirty="0">
+                <a:latin typeface="D2Coding" panose="020B0609020101020101" pitchFamily="49" charset="-127"/>
+                <a:ea typeface="D2Coding" panose="020B0609020101020101" pitchFamily="49" charset="-127"/>
+              </a:rPr>
+              <a:t> </a:t>
+            </a:r>
+            <a:r>
+              <a:rPr lang="ko-KR" altLang="en-US" dirty="0">
+                <a:latin typeface="D2Coding" panose="020B0609020101020101" pitchFamily="49" charset="-127"/>
+                <a:ea typeface="D2Coding" panose="020B0609020101020101" pitchFamily="49" charset="-127"/>
+              </a:rPr>
+              <a:t>구분함</a:t>
+            </a:r>
+            <a:endParaRPr lang="en-US" altLang="ko-KR" sz="1600" dirty="0">
+              <a:latin typeface="D2Coding" panose="020B0609020101020101" pitchFamily="49" charset="-127"/>
+              <a:ea typeface="D2Coding" panose="020B0609020101020101" pitchFamily="49" charset="-127"/>
+            </a:endParaRPr>
+          </a:p>
+          <a:p>
+            <a:pPr marL="285750" indent="-285750">
+              <a:lnSpc>
+                <a:spcPct val="150000"/>
+              </a:lnSpc>
+              <a:buFont typeface="Wingdings" panose="05000000000000000000" pitchFamily="2" charset="2"/>
+              <a:buChar char="v"/>
+            </a:pPr>
+            <a:r>
+              <a:rPr lang="en-US" altLang="ko-KR" dirty="0">
+                <a:latin typeface="D2Coding" panose="020B0609020101020101" pitchFamily="49" charset="-127"/>
+                <a:ea typeface="D2Coding" panose="020B0609020101020101" pitchFamily="49" charset="-127"/>
+              </a:rPr>
+              <a:t>AI</a:t>
+            </a:r>
+            <a:r>
+              <a:rPr lang="ko-KR" altLang="en-US" dirty="0">
+                <a:latin typeface="D2Coding" panose="020B0609020101020101" pitchFamily="49" charset="-127"/>
+                <a:ea typeface="D2Coding" panose="020B0609020101020101" pitchFamily="49" charset="-127"/>
+              </a:rPr>
+              <a:t>에게 시스템의 통제권을 얼마나 맡길 것인가</a:t>
+            </a:r>
+            <a:r>
+              <a:rPr lang="en-US" altLang="ko-KR" dirty="0">
+                <a:latin typeface="D2Coding" panose="020B0609020101020101" pitchFamily="49" charset="-127"/>
+                <a:ea typeface="D2Coding" panose="020B0609020101020101" pitchFamily="49" charset="-127"/>
+              </a:rPr>
+              <a:t>?"</a:t>
+            </a:r>
+            <a:r>
+              <a:rPr lang="ko-KR" altLang="en-US" dirty="0">
+                <a:latin typeface="D2Coding" panose="020B0609020101020101" pitchFamily="49" charset="-127"/>
+                <a:ea typeface="D2Coding" panose="020B0609020101020101" pitchFamily="49" charset="-127"/>
+              </a:rPr>
+              <a:t>를 기준으로 </a:t>
+            </a:r>
+            <a:r>
+              <a:rPr lang="en-US" altLang="ko-KR" dirty="0">
+                <a:latin typeface="D2Coding" panose="020B0609020101020101" pitchFamily="49" charset="-127"/>
+                <a:ea typeface="D2Coding" panose="020B0609020101020101" pitchFamily="49" charset="-127"/>
+              </a:rPr>
+              <a:t>AI </a:t>
+            </a:r>
+            <a:r>
+              <a:rPr lang="ko-KR" altLang="en-US" dirty="0">
+                <a:latin typeface="D2Coding" panose="020B0609020101020101" pitchFamily="49" charset="-127"/>
+                <a:ea typeface="D2Coding" panose="020B0609020101020101" pitchFamily="49" charset="-127"/>
+              </a:rPr>
+              <a:t>시스템을 분류</a:t>
+            </a:r>
+            <a:endParaRPr lang="en-US" altLang="ko-KR" dirty="0">
+              <a:latin typeface="D2Coding" panose="020B0609020101020101" pitchFamily="49" charset="-127"/>
+              <a:ea typeface="D2Coding" panose="020B0609020101020101" pitchFamily="49" charset="-127"/>
+            </a:endParaRPr>
+          </a:p>
+          <a:p>
+            <a:pPr marL="742950" lvl="1" indent="-285750">
+              <a:lnSpc>
+                <a:spcPct val="150000"/>
+              </a:lnSpc>
+              <a:buFont typeface="Wingdings" panose="05000000000000000000" pitchFamily="2" charset="2"/>
+              <a:buChar char="v"/>
+            </a:pPr>
+            <a:r>
+              <a:rPr lang="ko-KR" altLang="en-US" sz="1600" dirty="0">
+                <a:latin typeface="D2Coding" panose="020B0609020101020101" pitchFamily="49" charset="-127"/>
+                <a:ea typeface="D2Coding" panose="020B0609020101020101" pitchFamily="49" charset="-127"/>
+              </a:rPr>
+              <a:t>개발자가 아닌</a:t>
+            </a:r>
+            <a:r>
+              <a:rPr lang="en-US" altLang="ko-KR" sz="1600" dirty="0">
+                <a:latin typeface="D2Coding" panose="020B0609020101020101" pitchFamily="49" charset="-127"/>
+                <a:ea typeface="D2Coding" panose="020B0609020101020101" pitchFamily="49" charset="-127"/>
+              </a:rPr>
+              <a:t> LLM</a:t>
+            </a:r>
+            <a:r>
+              <a:rPr lang="ko-KR" altLang="en-US" sz="1600" dirty="0">
+                <a:latin typeface="D2Coding" panose="020B0609020101020101" pitchFamily="49" charset="-127"/>
+                <a:ea typeface="D2Coding" panose="020B0609020101020101" pitchFamily="49" charset="-127"/>
+              </a:rPr>
+              <a:t>이 스스로 판단해서 다음 행동을 결정하고 도구까지 실행하면 자율성이 높음</a:t>
+            </a:r>
+            <a:endParaRPr lang="ko-KR" altLang="en-US" dirty="0">
+              <a:latin typeface="D2Coding" panose="020B0609020101020101" pitchFamily="49" charset="-127"/>
+              <a:ea typeface="D2Coding" panose="020B0609020101020101" pitchFamily="49" charset="-127"/>
+            </a:endParaRPr>
+          </a:p>
+        </p:txBody>
+      </p:sp>
+      <p:pic>
+        <p:nvPicPr>
+          <p:cNvPr id="6" name="그림 5">
+            <a:extLst>
+              <a:ext uri="{FF2B5EF4-FFF2-40B4-BE49-F238E27FC236}">
+                <a16:creationId xmlns:a16="http://schemas.microsoft.com/office/drawing/2014/main" id="{2D2AD49E-11D5-0985-189A-5CCB05A6CBD0}"/>
+              </a:ext>
+            </a:extLst>
+          </p:cNvPr>
+          <p:cNvPicPr>
+            <a:picLocks noChangeAspect="1"/>
+          </p:cNvPicPr>
+          <p:nvPr/>
+        </p:nvPicPr>
+        <p:blipFill>
+          <a:blip r:embed="rId2"/>
+          <a:stretch>
+            <a:fillRect/>
+          </a:stretch>
+        </p:blipFill>
+        <p:spPr>
+          <a:xfrm>
+            <a:off x="4425049" y="2550113"/>
+            <a:ext cx="6142252" cy="4008467"/>
+          </a:xfrm>
+          <a:prstGeom prst="rect">
+            <a:avLst/>
+          </a:prstGeom>
+          <a:ln w="19050">
+            <a:solidFill>
+              <a:schemeClr val="tx1"/>
+            </a:solidFill>
+          </a:ln>
+        </p:spPr>
+      </p:pic>
+      <p:sp>
+        <p:nvSpPr>
+          <p:cNvPr id="10" name="TextBox 9">
+            <a:extLst>
+              <a:ext uri="{FF2B5EF4-FFF2-40B4-BE49-F238E27FC236}">
+                <a16:creationId xmlns:a16="http://schemas.microsoft.com/office/drawing/2014/main" id="{E0EA883E-4BED-0F41-0C0A-D7BA7CA1EAA7}"/>
+              </a:ext>
+            </a:extLst>
+          </p:cNvPr>
+          <p:cNvSpPr txBox="1"/>
+          <p:nvPr/>
+        </p:nvSpPr>
+        <p:spPr>
+          <a:xfrm>
+            <a:off x="1610069" y="2540588"/>
+            <a:ext cx="2814980" cy="584775"/>
+          </a:xfrm>
+          <a:prstGeom prst="rect">
+            <a:avLst/>
+          </a:prstGeom>
+          <a:solidFill>
+            <a:schemeClr val="tx1"/>
+          </a:solidFill>
+        </p:spPr>
+        <p:txBody>
+          <a:bodyPr wrap="square">
+            <a:spAutoFit/>
+          </a:bodyPr>
+          <a:lstStyle/>
+          <a:p>
+            <a:pPr algn="ctr"/>
+            <a:r>
+              <a:rPr lang="en-US" altLang="ko-KR" sz="1600" cap="none" dirty="0">
+                <a:solidFill>
+                  <a:schemeClr val="bg1"/>
+                </a:solidFill>
+                <a:latin typeface="D2Coding" panose="020B0609020101020101" pitchFamily="49" charset="-127"/>
+                <a:ea typeface="D2Coding" panose="020B0609020101020101" pitchFamily="49" charset="-127"/>
+                <a:cs typeface="Segoe UI Light" panose="020B0502040204020203" pitchFamily="34" charset="0"/>
+              </a:rPr>
+              <a:t>AI Agent Architecture</a:t>
+            </a:r>
+          </a:p>
+          <a:p>
+            <a:pPr algn="ctr"/>
+            <a:r>
+              <a:rPr lang="en-US" altLang="ko-KR" sz="1600" dirty="0">
+                <a:solidFill>
+                  <a:schemeClr val="bg1"/>
+                </a:solidFill>
+                <a:latin typeface="D2Coding" panose="020B0609020101020101" pitchFamily="49" charset="-127"/>
+                <a:ea typeface="D2Coding" panose="020B0609020101020101" pitchFamily="49" charset="-127"/>
+                <a:cs typeface="Segoe UI Light" panose="020B0502040204020203" pitchFamily="34" charset="0"/>
+              </a:rPr>
+              <a:t>(AI RAG)</a:t>
+            </a:r>
+            <a:endParaRPr lang="ko-KR" altLang="en-US" sz="1600" dirty="0">
+              <a:solidFill>
+                <a:schemeClr val="bg1"/>
+              </a:solidFill>
+            </a:endParaRPr>
+          </a:p>
+        </p:txBody>
+      </p:sp>
+      <p:sp>
+        <p:nvSpPr>
+          <p:cNvPr id="11" name="TextBox 10">
+            <a:extLst>
+              <a:ext uri="{FF2B5EF4-FFF2-40B4-BE49-F238E27FC236}">
+                <a16:creationId xmlns:a16="http://schemas.microsoft.com/office/drawing/2014/main" id="{9DD5190C-208C-96C0-313C-CCEE220A2C86}"/>
+              </a:ext>
+            </a:extLst>
+          </p:cNvPr>
+          <p:cNvSpPr txBox="1"/>
+          <p:nvPr/>
+        </p:nvSpPr>
+        <p:spPr>
+          <a:xfrm>
+            <a:off x="1610069" y="3596986"/>
+            <a:ext cx="2814980" cy="1077218"/>
+          </a:xfrm>
+          <a:prstGeom prst="rect">
+            <a:avLst/>
+          </a:prstGeom>
+          <a:solidFill>
+            <a:schemeClr val="tx1"/>
+          </a:solidFill>
+        </p:spPr>
+        <p:txBody>
+          <a:bodyPr wrap="square">
+            <a:spAutoFit/>
+          </a:bodyPr>
+          <a:lstStyle/>
+          <a:p>
+            <a:pPr marL="285750" indent="-285750">
+              <a:buFont typeface="Wingdings" panose="05000000000000000000" pitchFamily="2" charset="2"/>
+              <a:buChar char="ü"/>
+            </a:pPr>
+            <a:r>
+              <a:rPr lang="en-US" altLang="ko-KR" sz="1600" cap="none" dirty="0">
+                <a:solidFill>
+                  <a:schemeClr val="bg1"/>
+                </a:solidFill>
+                <a:latin typeface="D2Coding" panose="020B0609020101020101" pitchFamily="49" charset="-127"/>
+                <a:ea typeface="D2Coding" panose="020B0609020101020101" pitchFamily="49" charset="-127"/>
+                <a:cs typeface="Segoe UI Light" panose="020B0502040204020203" pitchFamily="34" charset="0"/>
+              </a:rPr>
+              <a:t>Function Calling</a:t>
+            </a:r>
+          </a:p>
+          <a:p>
+            <a:pPr marL="285750" indent="-285750">
+              <a:buFont typeface="Wingdings" panose="05000000000000000000" pitchFamily="2" charset="2"/>
+              <a:buChar char="ü"/>
+            </a:pPr>
+            <a:r>
+              <a:rPr lang="en-US" altLang="ko-KR" sz="1600" dirty="0">
+                <a:solidFill>
+                  <a:schemeClr val="bg1"/>
+                </a:solidFill>
+                <a:latin typeface="D2Coding" panose="020B0609020101020101" pitchFamily="49" charset="-127"/>
+                <a:ea typeface="D2Coding" panose="020B0609020101020101" pitchFamily="49" charset="-127"/>
+                <a:cs typeface="Segoe UI Light" panose="020B0502040204020203" pitchFamily="34" charset="0"/>
+              </a:rPr>
+              <a:t>Tools</a:t>
+            </a:r>
+          </a:p>
+          <a:p>
+            <a:pPr marL="285750" indent="-285750">
+              <a:buFont typeface="Wingdings" panose="05000000000000000000" pitchFamily="2" charset="2"/>
+              <a:buChar char="ü"/>
+            </a:pPr>
+            <a:r>
+              <a:rPr lang="en-US" altLang="ko-KR" sz="1600" dirty="0">
+                <a:solidFill>
+                  <a:schemeClr val="bg1"/>
+                </a:solidFill>
+                <a:latin typeface="D2Coding" panose="020B0609020101020101" pitchFamily="49" charset="-127"/>
+                <a:ea typeface="D2Coding" panose="020B0609020101020101" pitchFamily="49" charset="-127"/>
+                <a:cs typeface="Segoe UI Light" panose="020B0502040204020203" pitchFamily="34" charset="0"/>
+              </a:rPr>
+              <a:t>Agent</a:t>
+            </a:r>
+          </a:p>
+          <a:p>
+            <a:pPr marL="285750" indent="-285750">
+              <a:buFont typeface="Wingdings" panose="05000000000000000000" pitchFamily="2" charset="2"/>
+              <a:buChar char="ü"/>
+            </a:pPr>
+            <a:r>
+              <a:rPr lang="en-US" altLang="ko-KR" sz="1600" dirty="0">
+                <a:solidFill>
+                  <a:schemeClr val="bg1"/>
+                </a:solidFill>
+                <a:latin typeface="D2Coding" panose="020B0609020101020101" pitchFamily="49" charset="-127"/>
+                <a:ea typeface="D2Coding" panose="020B0609020101020101" pitchFamily="49" charset="-127"/>
+                <a:cs typeface="Segoe UI Light" panose="020B0502040204020203" pitchFamily="34" charset="0"/>
+              </a:rPr>
+              <a:t>MCP</a:t>
+            </a:r>
+            <a:endParaRPr lang="ko-KR" altLang="en-US" sz="1600" dirty="0">
+              <a:solidFill>
+                <a:schemeClr val="bg1"/>
+              </a:solidFill>
+            </a:endParaRPr>
+          </a:p>
+        </p:txBody>
+      </p:sp>
+    </p:spTree>
+    <p:extLst>
+      <p:ext uri="{BB962C8B-B14F-4D97-AF65-F5344CB8AC3E}">
+        <p14:creationId xmlns:p14="http://schemas.microsoft.com/office/powerpoint/2010/main" val="2827112439"/>
+      </p:ext>
+    </p:extLst>
+  </p:cSld>
+  <p:clrMapOvr>
+    <a:masterClrMapping/>
+  </p:clrMapOvr>
+</p:sld>
+</file>
+
+<file path=ppt/slides/slide7.xml><?xml version="1.0" encoding="utf-8"?>
 <p:sld xmlns:a="http://schemas.openxmlformats.org/drawingml/2006/main" xmlns:r="http://schemas.openxmlformats.org/officeDocument/2006/relationships" xmlns:p="http://schemas.openxmlformats.org/presentationml/2006/main">
   <p:cSld>
     <p:spTree>
@@ -5426,7 +6523,7 @@
                 <a:latin typeface="Tw Cen MT" panose="020B0602020104020603" pitchFamily="34" charset="0"/>
               </a:rPr>
               <a:pPr/>
-              <a:t>6</a:t>
+              <a:t>7</a:t>
             </a:fld>
             <a:endParaRPr lang="en-US" b="1" dirty="0">
               <a:latin typeface="Tw Cen MT" panose="020B0602020104020603" pitchFamily="34" charset="0"/>
@@ -5477,7 +6574,7 @@
 </p:sld>
 </file>
 
-<file path=ppt/slides/slide7.xml><?xml version="1.0" encoding="utf-8"?>
+<file path=ppt/slides/slide8.xml><?xml version="1.0" encoding="utf-8"?>
 <p:sld xmlns:a="http://schemas.openxmlformats.org/drawingml/2006/main" xmlns:r="http://schemas.openxmlformats.org/officeDocument/2006/relationships" xmlns:p="http://schemas.openxmlformats.org/presentationml/2006/main">
   <p:cSld>
     <p:spTree>
@@ -5606,7 +6703,7 @@
                 <a:latin typeface="Tw Cen MT" panose="020B0602020104020603" pitchFamily="34" charset="0"/>
               </a:rPr>
               <a:pPr/>
-              <a:t>7</a:t>
+              <a:t>8</a:t>
             </a:fld>
             <a:endParaRPr lang="en-US" b="1" dirty="0">
               <a:latin typeface="Tw Cen MT" panose="020B0602020104020603" pitchFamily="34" charset="0"/>
@@ -6804,7 +7901,7 @@
 </p:sld>
 </file>
 
-<file path=ppt/slides/slide8.xml><?xml version="1.0" encoding="utf-8"?>
+<file path=ppt/slides/slide9.xml><?xml version="1.0" encoding="utf-8"?>
 <p:sld xmlns:a="http://schemas.openxmlformats.org/drawingml/2006/main" xmlns:r="http://schemas.openxmlformats.org/officeDocument/2006/relationships" xmlns:p="http://schemas.openxmlformats.org/presentationml/2006/main">
   <p:cSld>
     <p:spTree>
@@ -6933,7 +8030,7 @@
                 <a:latin typeface="Tw Cen MT" panose="020B0602020104020603" pitchFamily="34" charset="0"/>
               </a:rPr>
               <a:pPr/>
-              <a:t>8</a:t>
+              <a:t>9</a:t>
             </a:fld>
             <a:endParaRPr lang="en-US" b="1" dirty="0">
               <a:latin typeface="Tw Cen MT" panose="020B0602020104020603" pitchFamily="34" charset="0"/>
@@ -7123,290 +8220,6 @@
     <p:extLst>
       <p:ext uri="{BB962C8B-B14F-4D97-AF65-F5344CB8AC3E}">
         <p14:creationId xmlns:p14="http://schemas.microsoft.com/office/powerpoint/2010/main" val="4107716516"/>
-      </p:ext>
-    </p:extLst>
-  </p:cSld>
-  <p:clrMapOvr>
-    <a:masterClrMapping/>
-  </p:clrMapOvr>
-</p:sld>
-</file>
-
-<file path=ppt/slides/slide9.xml><?xml version="1.0" encoding="utf-8"?>
-<p:sld xmlns:a="http://schemas.openxmlformats.org/drawingml/2006/main" xmlns:r="http://schemas.openxmlformats.org/officeDocument/2006/relationships" xmlns:p="http://schemas.openxmlformats.org/presentationml/2006/main">
-  <p:cSld>
-    <p:spTree>
-      <p:nvGrpSpPr>
-        <p:cNvPr id="1" name="">
-          <a:extLst>
-            <a:ext uri="{FF2B5EF4-FFF2-40B4-BE49-F238E27FC236}">
-              <a16:creationId xmlns:a16="http://schemas.microsoft.com/office/drawing/2014/main" id="{23B2A533-72B2-EF6D-6238-026B9D67DB50}"/>
-            </a:ext>
-          </a:extLst>
-        </p:cNvPr>
-        <p:cNvGrpSpPr/>
-        <p:nvPr/>
-      </p:nvGrpSpPr>
-      <p:grpSpPr>
-        <a:xfrm>
-          <a:off x="0" y="0"/>
-          <a:ext cx="0" cy="0"/>
-          <a:chOff x="0" y="0"/>
-          <a:chExt cx="0" cy="0"/>
-        </a:xfrm>
-      </p:grpSpPr>
-      <p:sp>
-        <p:nvSpPr>
-          <p:cNvPr id="3" name="제목 1">
-            <a:extLst>
-              <a:ext uri="{FF2B5EF4-FFF2-40B4-BE49-F238E27FC236}">
-                <a16:creationId xmlns:a16="http://schemas.microsoft.com/office/drawing/2014/main" id="{9229008F-B6B9-EC20-092E-4C2A51F4DDEC}"/>
-              </a:ext>
-            </a:extLst>
-          </p:cNvPr>
-          <p:cNvSpPr txBox="1">
-            <a:spLocks/>
-          </p:cNvSpPr>
-          <p:nvPr/>
-        </p:nvSpPr>
-        <p:spPr>
-          <a:xfrm>
-            <a:off x="475645" y="481983"/>
-            <a:ext cx="10353762" cy="766439"/>
-          </a:xfrm>
-          <a:prstGeom prst="rect">
-            <a:avLst/>
-          </a:prstGeom>
-        </p:spPr>
-        <p:txBody>
-          <a:bodyPr vert="horz" lIns="91440" tIns="45720" rIns="91440" bIns="45720" rtlCol="0" anchor="ctr">
-            <a:normAutofit/>
-          </a:bodyPr>
-          <a:lstStyle>
-            <a:lvl1pPr algn="ctr" defTabSz="914400" rtl="0" eaLnBrk="1" latinLnBrk="1" hangingPunct="1">
-              <a:lnSpc>
-                <a:spcPct val="90000"/>
-              </a:lnSpc>
-              <a:spcBef>
-                <a:spcPct val="0"/>
-              </a:spcBef>
-              <a:buNone/>
-              <a:defRPr sz="3200" kern="1200" cap="all" baseline="0">
-                <a:solidFill>
-                  <a:schemeClr val="tx1"/>
-                </a:solidFill>
-                <a:effectLst/>
-                <a:latin typeface="Batang" panose="02030600000101010101" pitchFamily="18" charset="-127"/>
-                <a:ea typeface="Batang" panose="02030600000101010101" pitchFamily="18" charset="-127"/>
-                <a:cs typeface="+mj-cs"/>
-              </a:defRPr>
-            </a:lvl1pPr>
-          </a:lstStyle>
-          <a:p>
-            <a:pPr algn="l"/>
-            <a:r>
-              <a:rPr lang="en-US" altLang="ko-KR" sz="2800" cap="none" dirty="0">
-                <a:solidFill>
-                  <a:schemeClr val="bg2">
-                    <a:lumMod val="25000"/>
-                  </a:schemeClr>
-                </a:solidFill>
-                <a:latin typeface="D2Coding" panose="020B0609020101020101" pitchFamily="49" charset="-127"/>
-                <a:ea typeface="D2Coding" panose="020B0609020101020101" pitchFamily="49" charset="-127"/>
-                <a:cs typeface="Segoe UI Light" panose="020B0502040204020203" pitchFamily="34" charset="0"/>
-              </a:rPr>
-              <a:t>Architecture #2: Chain</a:t>
-            </a:r>
-            <a:endParaRPr lang="ko-KR" altLang="en-US" sz="2800" cap="none" dirty="0">
-              <a:solidFill>
-                <a:schemeClr val="bg2">
-                  <a:lumMod val="25000"/>
-                </a:schemeClr>
-              </a:solidFill>
-              <a:latin typeface="D2Coding" panose="020B0609020101020101" pitchFamily="49" charset="-127"/>
-              <a:ea typeface="D2Coding" panose="020B0609020101020101" pitchFamily="49" charset="-127"/>
-              <a:cs typeface="Segoe UI Light" panose="020B0502040204020203" pitchFamily="34" charset="0"/>
-            </a:endParaRPr>
-          </a:p>
-        </p:txBody>
-      </p:sp>
-      <p:sp>
-        <p:nvSpPr>
-          <p:cNvPr id="2" name="슬라이드 번호 개체 틀 3">
-            <a:extLst>
-              <a:ext uri="{FF2B5EF4-FFF2-40B4-BE49-F238E27FC236}">
-                <a16:creationId xmlns:a16="http://schemas.microsoft.com/office/drawing/2014/main" id="{ACD3F4E9-EF2D-B274-E5DA-7B48FA056692}"/>
-              </a:ext>
-            </a:extLst>
-          </p:cNvPr>
-          <p:cNvSpPr>
-            <a:spLocks noGrp="1"/>
-          </p:cNvSpPr>
-          <p:nvPr>
-            <p:ph type="sldNum" sz="quarter" idx="12"/>
-          </p:nvPr>
-        </p:nvSpPr>
-        <p:spPr>
-          <a:xfrm>
-            <a:off x="11177052" y="299420"/>
-            <a:ext cx="753545" cy="365125"/>
-          </a:xfrm>
-        </p:spPr>
-        <p:txBody>
-          <a:bodyPr/>
-          <a:lstStyle/>
-          <a:p>
-            <a:fld id="{D57F1E4F-1CFF-5643-939E-217C01CDF565}" type="slidenum">
-              <a:rPr lang="en-US" b="1" smtClean="0">
-                <a:latin typeface="Tw Cen MT" panose="020B0602020104020603" pitchFamily="34" charset="0"/>
-              </a:rPr>
-              <a:pPr/>
-              <a:t>9</a:t>
-            </a:fld>
-            <a:endParaRPr lang="en-US" b="1" dirty="0">
-              <a:latin typeface="Tw Cen MT" panose="020B0602020104020603" pitchFamily="34" charset="0"/>
-            </a:endParaRPr>
-          </a:p>
-        </p:txBody>
-      </p:sp>
-      <p:pic>
-        <p:nvPicPr>
-          <p:cNvPr id="5" name="그림 4">
-            <a:extLst>
-              <a:ext uri="{FF2B5EF4-FFF2-40B4-BE49-F238E27FC236}">
-                <a16:creationId xmlns:a16="http://schemas.microsoft.com/office/drawing/2014/main" id="{4C5B1EBE-2826-8603-F1F9-0E0E988BBFF8}"/>
-              </a:ext>
-            </a:extLst>
-          </p:cNvPr>
-          <p:cNvPicPr>
-            <a:picLocks noChangeAspect="1"/>
-          </p:cNvPicPr>
-          <p:nvPr/>
-        </p:nvPicPr>
-        <p:blipFill>
-          <a:blip r:embed="rId2"/>
-          <a:stretch>
-            <a:fillRect/>
-          </a:stretch>
-        </p:blipFill>
-        <p:spPr>
-          <a:xfrm>
-            <a:off x="4672315" y="2466821"/>
-            <a:ext cx="2179509" cy="3543607"/>
-          </a:xfrm>
-          <a:prstGeom prst="rect">
-            <a:avLst/>
-          </a:prstGeom>
-        </p:spPr>
-      </p:pic>
-      <p:sp>
-        <p:nvSpPr>
-          <p:cNvPr id="7" name="TextBox 6">
-            <a:extLst>
-              <a:ext uri="{FF2B5EF4-FFF2-40B4-BE49-F238E27FC236}">
-                <a16:creationId xmlns:a16="http://schemas.microsoft.com/office/drawing/2014/main" id="{F79F9566-4C01-7D2E-D410-70150E5DA57D}"/>
-              </a:ext>
-            </a:extLst>
-          </p:cNvPr>
-          <p:cNvSpPr txBox="1"/>
-          <p:nvPr/>
-        </p:nvSpPr>
-        <p:spPr>
-          <a:xfrm>
-            <a:off x="547385" y="1248422"/>
-            <a:ext cx="11087705" cy="793166"/>
-          </a:xfrm>
-          <a:prstGeom prst="rect">
-            <a:avLst/>
-          </a:prstGeom>
-          <a:noFill/>
-        </p:spPr>
-        <p:txBody>
-          <a:bodyPr wrap="square">
-            <a:spAutoFit/>
-          </a:bodyPr>
-          <a:lstStyle/>
-          <a:p>
-            <a:pPr>
-              <a:lnSpc>
-                <a:spcPct val="150000"/>
-              </a:lnSpc>
-              <a:buNone/>
-            </a:pPr>
-            <a:r>
-              <a:rPr lang="en-US" altLang="ko-KR" sz="1600" dirty="0">
-                <a:latin typeface="D2Coding" panose="020B0609020101020101" pitchFamily="49" charset="-127"/>
-                <a:ea typeface="D2Coding" panose="020B0609020101020101" pitchFamily="49" charset="-127"/>
-              </a:rPr>
-              <a:t>LLM</a:t>
-            </a:r>
-            <a:r>
-              <a:rPr lang="ko-KR" altLang="en-US" sz="1600" dirty="0">
-                <a:latin typeface="D2Coding" panose="020B0609020101020101" pitchFamily="49" charset="-127"/>
-                <a:ea typeface="D2Coding" panose="020B0609020101020101" pitchFamily="49" charset="-127"/>
-              </a:rPr>
-              <a:t> 애플리케이션이 실행될 때마다 입력 값과 결과는 달라지지만</a:t>
-            </a:r>
-            <a:r>
-              <a:rPr lang="en-US" altLang="ko-KR" sz="1600" dirty="0">
-                <a:latin typeface="D2Coding" panose="020B0609020101020101" pitchFamily="49" charset="-127"/>
-                <a:ea typeface="D2Coding" panose="020B0609020101020101" pitchFamily="49" charset="-127"/>
-              </a:rPr>
-              <a:t>, </a:t>
-            </a:r>
-            <a:r>
-              <a:rPr lang="ko-KR" altLang="en-US" sz="1600" dirty="0">
-                <a:latin typeface="D2Coding" panose="020B0609020101020101" pitchFamily="49" charset="-127"/>
-                <a:ea typeface="D2Coding" panose="020B0609020101020101" pitchFamily="49" charset="-127"/>
-              </a:rPr>
-              <a:t>여러 번의 </a:t>
-            </a:r>
-            <a:r>
-              <a:rPr lang="en-US" altLang="ko-KR" sz="1600" dirty="0">
-                <a:latin typeface="D2Coding" panose="020B0609020101020101" pitchFamily="49" charset="-127"/>
-                <a:ea typeface="D2Coding" panose="020B0609020101020101" pitchFamily="49" charset="-127"/>
-              </a:rPr>
-              <a:t>LLM </a:t>
-            </a:r>
-            <a:r>
-              <a:rPr lang="ko-KR" altLang="en-US" sz="1600" dirty="0">
-                <a:latin typeface="D2Coding" panose="020B0609020101020101" pitchFamily="49" charset="-127"/>
-                <a:ea typeface="D2Coding" panose="020B0609020101020101" pitchFamily="49" charset="-127"/>
-              </a:rPr>
-              <a:t>호출을 순차적으로 활용하여 </a:t>
-            </a:r>
-            <a:r>
-              <a:rPr lang="en-US" altLang="ko-KR" sz="1600" dirty="0">
-                <a:latin typeface="D2Coding" panose="020B0609020101020101" pitchFamily="49" charset="-127"/>
-                <a:ea typeface="D2Coding" panose="020B0609020101020101" pitchFamily="49" charset="-127"/>
-              </a:rPr>
-              <a:t>SQL </a:t>
-            </a:r>
-            <a:r>
-              <a:rPr lang="ko-KR" altLang="en-US" sz="1600" dirty="0">
-                <a:latin typeface="D2Coding" panose="020B0609020101020101" pitchFamily="49" charset="-127"/>
-                <a:ea typeface="D2Coding" panose="020B0609020101020101" pitchFamily="49" charset="-127"/>
-              </a:rPr>
-              <a:t>쿼리를 생성하여 더욱 정교한 애플리케이션을 </a:t>
-            </a:r>
-            <a:r>
-              <a:rPr lang="ko-KR" altLang="en-US" sz="1600" dirty="0" err="1">
-                <a:latin typeface="D2Coding" panose="020B0609020101020101" pitchFamily="49" charset="-127"/>
-                <a:ea typeface="D2Coding" panose="020B0609020101020101" pitchFamily="49" charset="-127"/>
-              </a:rPr>
-              <a:t>만듬</a:t>
-            </a:r>
-            <a:endParaRPr lang="en-US" altLang="ko-KR" sz="1600" dirty="0">
-              <a:latin typeface="D2Coding" panose="020B0609020101020101" pitchFamily="49" charset="-127"/>
-              <a:ea typeface="D2Coding" panose="020B0609020101020101" pitchFamily="49" charset="-127"/>
-            </a:endParaRPr>
-          </a:p>
-        </p:txBody>
-      </p:sp>
-    </p:spTree>
-    <p:extLst>
-      <p:ext uri="{BB962C8B-B14F-4D97-AF65-F5344CB8AC3E}">
-        <p14:creationId xmlns:p14="http://schemas.microsoft.com/office/powerpoint/2010/main" val="928237282"/>
       </p:ext>
     </p:extLst>
   </p:cSld>

--- a/ppts/CHAPTER 5 Cognitive Architectures with LangGraph.pptx
+++ b/ppts/CHAPTER 5 Cognitive Architectures with LangGraph.pptx
@@ -6166,7 +6166,7 @@
         </p:nvSpPr>
         <p:spPr>
           <a:xfrm>
-            <a:off x="1610069" y="2540588"/>
+            <a:off x="1610069" y="2531063"/>
             <a:ext cx="2814980" cy="584775"/>
           </a:xfrm>
           <a:prstGeom prst="rect">
